--- a/заняття_2/Безпека та керування доступом (IAM).pptx
+++ b/заняття_2/Безпека та керування доступом (IAM).pptx
@@ -14,8 +14,8 @@
     <p:sldId id="258" r:id="rId5"/>
     <p:sldId id="259" r:id="rId6"/>
     <p:sldId id="260" r:id="rId7"/>
-    <p:sldId id="261" r:id="rId8"/>
-    <p:sldId id="262" r:id="rId9"/>
+    <p:sldId id="262" r:id="rId8"/>
+    <p:sldId id="261" r:id="rId9"/>
     <p:sldId id="263" r:id="rId10"/>
     <p:sldId id="265" r:id="rId11"/>
   </p:sldIdLst>
@@ -950,15 +950,7 @@
           <a:p>
             <a:r>
               <a:rPr lang="en-US" dirty="0"/>
-              <a:t>Покажу, як це виглядає на практиці, крок за кроком — так само, як ви робитимете це самі під час лабораторної роботи. Найперше: root-користувач — це особливий акаунт з повним доступом, створений при реєстрації AWS, і для нього MFA обов'язковий буквально з першого дня, як і для всіх адміністраторів. Далі заходимо в консоль IAM, обираємо потрібного користувача і в розділі Security credentials знаходимо пункт Assign MFA device. AWS запропонує кілька варіантів: найпростіший — віртуальний MFA-пристрій, тобто застосунок-автентифікатор на телефоні, на кшталт Google Authenticator чи Authy; є й апаратні ключі, типу YubiKey, для ще вищого рівня безпеки. Скануємо QR-код застосунком — він почне генерувати одноразові 6-значні коди, що змінюються кожні 30 секунд. AWS попросить ввести два коди підряд, щоб переконатись, що синхронізація пройшла коректно — і </a:t>
-            </a:r>
-            <a:r>
-              <a:rPr lang="en-US" dirty="0" err="1"/>
-              <a:t>після</a:t>
-            </a:r>
-            <a:r>
-              <a:rPr lang="en-US" dirty="0"/>
-              <a:t> цього при кожному вході, окрім пароля, потрібно буде ввести код з телефону.</a:t>
+              <a:t>Дуже поширений на практиці сценарій — коли один сервіс AWS повинен звернутись до іншого. Наприклад, застосунок на EC2-інстансі повинен прочитати файл конфігурації з S3, або Lambda-функція повинна записати результат обробки в DynamoDB. Найгірший спосіб це зробити — захардкодити ключі доступу IAM-користувача прямо в коді застосунку: якщо код колись потрапить у публічний репозиторій, ключі буде скомпрометовано. Правильний спосіб — прив'язати до EC2-інстансу чи Lambda-функції IAM-роль. AWS сам, "під капотом", видає застосунку тимчасові облікові дані, які автоматично ротуються, — розробнику взагалі не потрібно керувати жодними ключами. Технічно це відбувається через AWS Security Token Service (STS), який видає токени з обмеженим часом дії. Це і безпечніше, і зручніше: якщо роль скомпрометована, тимчасові токени самі стануть недійсними за лічені години, на відміну від постійних ключів доступу, які потрібно вручну відкликати.</a:t>
             </a:r>
           </a:p>
         </p:txBody>
@@ -1052,7 +1044,15 @@
           <a:p>
             <a:r>
               <a:rPr lang="en-US" dirty="0"/>
-              <a:t>Дуже поширений на практиці сценарій — коли один сервіс AWS повинен звернутись до іншого. Наприклад, застосунок на EC2-інстансі повинен прочитати файл конфігурації з S3, або Lambda-функція повинна записати результат обробки в DynamoDB. Найгірший спосіб це зробити — захардкодити ключі доступу IAM-користувача прямо в коді застосунку: якщо код колись потрапить у публічний репозиторій, ключі буде скомпрометовано. Правильний спосіб — прив'язати до EC2-інстансу чи Lambda-функції IAM-роль. AWS сам, "під капотом", видає застосунку тимчасові облікові дані, які автоматично ротуються, — розробнику взагалі не потрібно керувати жодними ключами. Технічно це відбувається через AWS Security Token Service (STS), який видає токени з обмеженим часом дії. Це і безпечніше, і зручніше: якщо роль скомпрометована, тимчасові токени самі стануть недійсними за лічені години, на відміну від постійних ключів доступу, які потрібно вручну відкликати.</a:t>
+              <a:t>Покажу, як це виглядає на практиці, крок за кроком — так само, як ви робитимете це самі під час лабораторної роботи. Найперше: root-користувач — це особливий акаунт з повним доступом, створений при реєстрації AWS, і для нього MFA обов'язковий буквально з першого дня, як і для всіх адміністраторів. Далі заходимо в консоль IAM, обираємо потрібного користувача і в розділі Security credentials знаходимо пункт Assign MFA device. AWS запропонує кілька варіантів: найпростіший — віртуальний MFA-пристрій, тобто застосунок-автентифікатор на телефоні, на кшталт Google Authenticator чи Authy; є й апаратні ключі, типу YubiKey, для ще вищого рівня безпеки. Скануємо QR-код застосунком — він почне генерувати одноразові 6-значні коди, що змінюються кожні 30 секунд. AWS попросить ввести два коди підряд, щоб переконатись, що синхронізація пройшла коректно — і </a:t>
+            </a:r>
+            <a:r>
+              <a:rPr lang="en-US" dirty="0" err="1"/>
+              <a:t>після</a:t>
+            </a:r>
+            <a:r>
+              <a:rPr lang="en-US" dirty="0"/>
+              <a:t> цього при кожному вході, окрім пароля, потрібно буде ввести код з телефону.</a:t>
             </a:r>
           </a:p>
         </p:txBody>
@@ -7169,6 +7169,839 @@
 
 <file path=ppt/slides/slide7.xml><?xml version="1.0" encoding="utf-8"?>
 <p:sld xmlns:a="http://schemas.openxmlformats.org/drawingml/2006/main" xmlns:r="http://schemas.openxmlformats.org/officeDocument/2006/relationships" xmlns:p="http://schemas.openxmlformats.org/presentationml/2006/main">
+  <p:cSld name="Slide 7">
+    <p:bg>
+      <p:bgPr>
+        <a:solidFill>
+          <a:srgbClr val="232F3E"/>
+        </a:solidFill>
+        <a:effectLst/>
+      </p:bgPr>
+    </p:bg>
+    <p:spTree>
+      <p:nvGrpSpPr>
+        <p:cNvPr id="1" name=""/>
+        <p:cNvGrpSpPr/>
+        <p:nvPr/>
+      </p:nvGrpSpPr>
+      <p:grpSpPr>
+        <a:xfrm>
+          <a:off x="0" y="0"/>
+          <a:ext cx="0" cy="0"/>
+          <a:chOff x="0" y="0"/>
+          <a:chExt cx="0" cy="0"/>
+        </a:xfrm>
+      </p:grpSpPr>
+      <p:sp>
+        <p:nvSpPr>
+          <p:cNvPr id="3" name="Text 1"/>
+          <p:cNvSpPr txBox="1"/>
+          <p:nvPr/>
+        </p:nvSpPr>
+        <p:spPr>
+          <a:xfrm>
+            <a:off x="548640" y="388620"/>
+            <a:ext cx="11064240" cy="822960"/>
+          </a:xfrm>
+          <a:prstGeom prst="rect">
+            <a:avLst/>
+          </a:prstGeom>
+          <a:noFill/>
+          <a:ln/>
+        </p:spPr>
+        <p:txBody>
+          <a:bodyPr wrap="square" rtlCol="0" anchor="ctr"/>
+          <a:lstStyle/>
+          <a:p>
+            <a:pPr marL="0" indent="0">
+              <a:buNone/>
+            </a:pPr>
+            <a:r>
+              <a:rPr lang="en-US" sz="2700" b="1" dirty="0">
+                <a:solidFill>
+                  <a:srgbClr val="FFFFFF"/>
+                </a:solidFill>
+                <a:latin typeface="Cambria" pitchFamily="34" charset="0"/>
+                <a:ea typeface="Cambria" pitchFamily="34" charset="-122"/>
+                <a:cs typeface="Cambria" pitchFamily="34" charset="-120"/>
+              </a:rPr>
+              <a:t>Ролі для сервісів: як AWS-сервіси довіряють одне одному</a:t>
+            </a:r>
+            <a:endParaRPr lang="en-US" sz="2700" dirty="0"/>
+          </a:p>
+        </p:txBody>
+      </p:sp>
+      <p:sp>
+        <p:nvSpPr>
+          <p:cNvPr id="4" name="Text 2"/>
+          <p:cNvSpPr txBox="1"/>
+          <p:nvPr/>
+        </p:nvSpPr>
+        <p:spPr>
+          <a:xfrm>
+            <a:off x="548640" y="1312165"/>
+            <a:ext cx="10789920" cy="457200"/>
+          </a:xfrm>
+          <a:prstGeom prst="rect">
+            <a:avLst/>
+          </a:prstGeom>
+          <a:noFill/>
+          <a:ln/>
+        </p:spPr>
+        <p:txBody>
+          <a:bodyPr wrap="square" rtlCol="0" anchor="ctr"/>
+          <a:lstStyle/>
+          <a:p>
+            <a:pPr marL="0" indent="0">
+              <a:buNone/>
+            </a:pPr>
+            <a:r>
+              <a:rPr lang="en-US" sz="1300" i="1" dirty="0">
+                <a:solidFill>
+                  <a:srgbClr val="CADCFC"/>
+                </a:solidFill>
+                <a:latin typeface="Calibri" pitchFamily="34" charset="0"/>
+                <a:ea typeface="Calibri" pitchFamily="34" charset="-122"/>
+                <a:cs typeface="Calibri" pitchFamily="34" charset="-120"/>
+              </a:rPr>
+              <a:t>Сервісні ролі дозволяють одному сервісу AWS звертатись до іншого без збереження постійних ключів доступу в коді.</a:t>
+            </a:r>
+            <a:endParaRPr lang="en-US" sz="1300" dirty="0"/>
+          </a:p>
+        </p:txBody>
+      </p:sp>
+      <p:sp>
+        <p:nvSpPr>
+          <p:cNvPr id="5" name="Shape 3"/>
+          <p:cNvSpPr/>
+          <p:nvPr/>
+        </p:nvSpPr>
+        <p:spPr>
+          <a:xfrm>
+            <a:off x="1280160" y="2743200"/>
+            <a:ext cx="1920240" cy="1188720"/>
+          </a:xfrm>
+          <a:prstGeom prst="roundRect">
+            <a:avLst>
+              <a:gd name="adj" fmla="val 7692"/>
+            </a:avLst>
+          </a:prstGeom>
+          <a:solidFill>
+            <a:srgbClr val="37475A"/>
+          </a:solidFill>
+          <a:ln/>
+        </p:spPr>
+        <p:txBody>
+          <a:bodyPr/>
+          <a:lstStyle/>
+          <a:p>
+            <a:endParaRPr lang="en-UA"/>
+          </a:p>
+        </p:txBody>
+      </p:sp>
+      <p:pic>
+        <p:nvPicPr>
+          <p:cNvPr id="6" name="Image 0" descr="/home/claude/icons/server_orange.png"/>
+          <p:cNvPicPr>
+            <a:picLocks noChangeAspect="1"/>
+          </p:cNvPicPr>
+          <p:nvPr/>
+        </p:nvPicPr>
+        <p:blipFill>
+          <a:blip r:embed="rId3"/>
+          <a:stretch>
+            <a:fillRect/>
+          </a:stretch>
+        </p:blipFill>
+        <p:spPr>
+          <a:xfrm>
+            <a:off x="1984248" y="2926080"/>
+            <a:ext cx="512064" cy="512064"/>
+          </a:xfrm>
+          <a:prstGeom prst="rect">
+            <a:avLst/>
+          </a:prstGeom>
+        </p:spPr>
+      </p:pic>
+      <p:sp>
+        <p:nvSpPr>
+          <p:cNvPr id="7" name="Text 4"/>
+          <p:cNvSpPr txBox="1"/>
+          <p:nvPr/>
+        </p:nvSpPr>
+        <p:spPr>
+          <a:xfrm>
+            <a:off x="1280160" y="3547872"/>
+            <a:ext cx="1920240" cy="320040"/>
+          </a:xfrm>
+          <a:prstGeom prst="rect">
+            <a:avLst/>
+          </a:prstGeom>
+          <a:noFill/>
+          <a:ln/>
+        </p:spPr>
+        <p:txBody>
+          <a:bodyPr wrap="square" rtlCol="0" anchor="ctr"/>
+          <a:lstStyle/>
+          <a:p>
+            <a:pPr marL="0" indent="0" algn="ctr">
+              <a:buNone/>
+            </a:pPr>
+            <a:r>
+              <a:rPr lang="en-US" sz="1200" b="1" dirty="0">
+                <a:solidFill>
+                  <a:srgbClr val="FFFFFF"/>
+                </a:solidFill>
+                <a:latin typeface="Calibri" pitchFamily="34" charset="0"/>
+                <a:ea typeface="Calibri" pitchFamily="34" charset="-122"/>
+                <a:cs typeface="Calibri" pitchFamily="34" charset="-120"/>
+              </a:rPr>
+              <a:t>EC2 Instance</a:t>
+            </a:r>
+            <a:endParaRPr lang="en-US" sz="1200" dirty="0"/>
+          </a:p>
+        </p:txBody>
+      </p:sp>
+      <p:sp>
+        <p:nvSpPr>
+          <p:cNvPr id="8" name="Shape 5"/>
+          <p:cNvSpPr/>
+          <p:nvPr/>
+        </p:nvSpPr>
+        <p:spPr>
+          <a:xfrm>
+            <a:off x="3429000" y="3337560"/>
+            <a:ext cx="5303520" cy="0"/>
+          </a:xfrm>
+          <a:prstGeom prst="line">
+            <a:avLst/>
+          </a:prstGeom>
+          <a:noFill/>
+          <a:ln w="25400">
+            <a:solidFill>
+              <a:srgbClr val="FF9900"/>
+            </a:solidFill>
+            <a:prstDash val="solid"/>
+            <a:tailEnd type="triangle"/>
+          </a:ln>
+        </p:spPr>
+        <p:txBody>
+          <a:bodyPr/>
+          <a:lstStyle/>
+          <a:p>
+            <a:endParaRPr lang="en-UA"/>
+          </a:p>
+        </p:txBody>
+      </p:sp>
+      <p:sp>
+        <p:nvSpPr>
+          <p:cNvPr id="9" name="Shape 6"/>
+          <p:cNvSpPr/>
+          <p:nvPr/>
+        </p:nvSpPr>
+        <p:spPr>
+          <a:xfrm>
+            <a:off x="5120640" y="2574036"/>
+            <a:ext cx="1920240" cy="384048"/>
+          </a:xfrm>
+          <a:prstGeom prst="roundRect">
+            <a:avLst>
+              <a:gd name="adj" fmla="val 50000"/>
+            </a:avLst>
+          </a:prstGeom>
+          <a:solidFill>
+            <a:srgbClr val="FF9900"/>
+          </a:solidFill>
+          <a:ln/>
+        </p:spPr>
+        <p:txBody>
+          <a:bodyPr/>
+          <a:lstStyle/>
+          <a:p>
+            <a:endParaRPr lang="en-UA"/>
+          </a:p>
+        </p:txBody>
+      </p:sp>
+      <p:sp>
+        <p:nvSpPr>
+          <p:cNvPr id="10" name="Text 7"/>
+          <p:cNvSpPr txBox="1"/>
+          <p:nvPr/>
+        </p:nvSpPr>
+        <p:spPr>
+          <a:xfrm>
+            <a:off x="5120640" y="2574036"/>
+            <a:ext cx="1920240" cy="384048"/>
+          </a:xfrm>
+          <a:prstGeom prst="rect">
+            <a:avLst/>
+          </a:prstGeom>
+          <a:noFill/>
+          <a:ln/>
+        </p:spPr>
+        <p:txBody>
+          <a:bodyPr wrap="square" rtlCol="0" anchor="ctr"/>
+          <a:lstStyle/>
+          <a:p>
+            <a:pPr marL="0" indent="0" algn="ctr">
+              <a:buNone/>
+            </a:pPr>
+            <a:r>
+              <a:rPr lang="en-US" sz="1050" b="1" dirty="0">
+                <a:solidFill>
+                  <a:srgbClr val="232F3E"/>
+                </a:solidFill>
+                <a:latin typeface="Calibri" pitchFamily="34" charset="0"/>
+                <a:ea typeface="Calibri" pitchFamily="34" charset="-122"/>
+                <a:cs typeface="Calibri" pitchFamily="34" charset="-120"/>
+              </a:rPr>
+              <a:t>IAM Role</a:t>
+            </a:r>
+            <a:endParaRPr lang="en-US" sz="1050" dirty="0"/>
+          </a:p>
+        </p:txBody>
+      </p:sp>
+      <p:sp>
+        <p:nvSpPr>
+          <p:cNvPr id="11" name="Text 8"/>
+          <p:cNvSpPr txBox="1"/>
+          <p:nvPr/>
+        </p:nvSpPr>
+        <p:spPr>
+          <a:xfrm>
+            <a:off x="3429000" y="3410712"/>
+            <a:ext cx="5303520" cy="274320"/>
+          </a:xfrm>
+          <a:prstGeom prst="rect">
+            <a:avLst/>
+          </a:prstGeom>
+          <a:noFill/>
+          <a:ln/>
+        </p:spPr>
+        <p:txBody>
+          <a:bodyPr wrap="square" rtlCol="0" anchor="ctr"/>
+          <a:lstStyle/>
+          <a:p>
+            <a:pPr marL="0" indent="0" algn="ctr">
+              <a:buNone/>
+            </a:pPr>
+            <a:r>
+              <a:rPr lang="en-US" sz="1000" i="1" dirty="0">
+                <a:solidFill>
+                  <a:srgbClr val="C7CFDA"/>
+                </a:solidFill>
+                <a:latin typeface="Calibri" pitchFamily="34" charset="0"/>
+                <a:ea typeface="Calibri" pitchFamily="34" charset="-122"/>
+                <a:cs typeface="Calibri" pitchFamily="34" charset="-120"/>
+              </a:rPr>
+              <a:t>читає файли конфігурації</a:t>
+            </a:r>
+            <a:endParaRPr lang="en-US" sz="1000" dirty="0"/>
+          </a:p>
+        </p:txBody>
+      </p:sp>
+      <p:sp>
+        <p:nvSpPr>
+          <p:cNvPr id="12" name="Shape 9"/>
+          <p:cNvSpPr/>
+          <p:nvPr/>
+        </p:nvSpPr>
+        <p:spPr>
+          <a:xfrm>
+            <a:off x="8961120" y="2743200"/>
+            <a:ext cx="1920240" cy="1188720"/>
+          </a:xfrm>
+          <a:prstGeom prst="roundRect">
+            <a:avLst>
+              <a:gd name="adj" fmla="val 7692"/>
+            </a:avLst>
+          </a:prstGeom>
+          <a:solidFill>
+            <a:srgbClr val="37475A"/>
+          </a:solidFill>
+          <a:ln/>
+        </p:spPr>
+        <p:txBody>
+          <a:bodyPr/>
+          <a:lstStyle/>
+          <a:p>
+            <a:endParaRPr lang="en-UA"/>
+          </a:p>
+        </p:txBody>
+      </p:sp>
+      <p:pic>
+        <p:nvPicPr>
+          <p:cNvPr id="13" name="Image 1" descr="/home/claude/icons/cube_orange.png"/>
+          <p:cNvPicPr>
+            <a:picLocks noChangeAspect="1"/>
+          </p:cNvPicPr>
+          <p:nvPr/>
+        </p:nvPicPr>
+        <p:blipFill>
+          <a:blip r:embed="rId4"/>
+          <a:stretch>
+            <a:fillRect/>
+          </a:stretch>
+        </p:blipFill>
+        <p:spPr>
+          <a:xfrm>
+            <a:off x="9665208" y="2926080"/>
+            <a:ext cx="512064" cy="512064"/>
+          </a:xfrm>
+          <a:prstGeom prst="rect">
+            <a:avLst/>
+          </a:prstGeom>
+        </p:spPr>
+      </p:pic>
+      <p:sp>
+        <p:nvSpPr>
+          <p:cNvPr id="14" name="Text 10"/>
+          <p:cNvSpPr txBox="1"/>
+          <p:nvPr/>
+        </p:nvSpPr>
+        <p:spPr>
+          <a:xfrm>
+            <a:off x="8961120" y="3547872"/>
+            <a:ext cx="1920240" cy="320040"/>
+          </a:xfrm>
+          <a:prstGeom prst="rect">
+            <a:avLst/>
+          </a:prstGeom>
+          <a:noFill/>
+          <a:ln/>
+        </p:spPr>
+        <p:txBody>
+          <a:bodyPr wrap="square" rtlCol="0" anchor="ctr"/>
+          <a:lstStyle/>
+          <a:p>
+            <a:pPr marL="0" indent="0" algn="ctr">
+              <a:buNone/>
+            </a:pPr>
+            <a:r>
+              <a:rPr lang="en-US" sz="1200" b="1" dirty="0">
+                <a:solidFill>
+                  <a:srgbClr val="FFFFFF"/>
+                </a:solidFill>
+                <a:latin typeface="Calibri" pitchFamily="34" charset="0"/>
+                <a:ea typeface="Calibri" pitchFamily="34" charset="-122"/>
+                <a:cs typeface="Calibri" pitchFamily="34" charset="-120"/>
+              </a:rPr>
+              <a:t>Amazon S3</a:t>
+            </a:r>
+            <a:endParaRPr lang="en-US" sz="1200" dirty="0"/>
+          </a:p>
+        </p:txBody>
+      </p:sp>
+      <p:sp>
+        <p:nvSpPr>
+          <p:cNvPr id="15" name="Shape 11"/>
+          <p:cNvSpPr/>
+          <p:nvPr/>
+        </p:nvSpPr>
+        <p:spPr>
+          <a:xfrm>
+            <a:off x="1280160" y="4663440"/>
+            <a:ext cx="1920240" cy="1188720"/>
+          </a:xfrm>
+          <a:prstGeom prst="roundRect">
+            <a:avLst>
+              <a:gd name="adj" fmla="val 7692"/>
+            </a:avLst>
+          </a:prstGeom>
+          <a:solidFill>
+            <a:srgbClr val="37475A"/>
+          </a:solidFill>
+          <a:ln/>
+        </p:spPr>
+        <p:txBody>
+          <a:bodyPr/>
+          <a:lstStyle/>
+          <a:p>
+            <a:endParaRPr lang="en-UA"/>
+          </a:p>
+        </p:txBody>
+      </p:sp>
+      <p:pic>
+        <p:nvPicPr>
+          <p:cNvPr id="16" name="Image 2" descr="/home/claude/icons/cogs_orange.png"/>
+          <p:cNvPicPr>
+            <a:picLocks noChangeAspect="1"/>
+          </p:cNvPicPr>
+          <p:nvPr/>
+        </p:nvPicPr>
+        <p:blipFill>
+          <a:blip r:embed="rId5"/>
+          <a:stretch>
+            <a:fillRect/>
+          </a:stretch>
+        </p:blipFill>
+        <p:spPr>
+          <a:xfrm>
+            <a:off x="1984248" y="4846320"/>
+            <a:ext cx="512064" cy="512064"/>
+          </a:xfrm>
+          <a:prstGeom prst="rect">
+            <a:avLst/>
+          </a:prstGeom>
+        </p:spPr>
+      </p:pic>
+      <p:sp>
+        <p:nvSpPr>
+          <p:cNvPr id="17" name="Text 12"/>
+          <p:cNvSpPr txBox="1"/>
+          <p:nvPr/>
+        </p:nvSpPr>
+        <p:spPr>
+          <a:xfrm>
+            <a:off x="1280160" y="5468112"/>
+            <a:ext cx="1920240" cy="320040"/>
+          </a:xfrm>
+          <a:prstGeom prst="rect">
+            <a:avLst/>
+          </a:prstGeom>
+          <a:noFill/>
+          <a:ln/>
+        </p:spPr>
+        <p:txBody>
+          <a:bodyPr wrap="square" rtlCol="0" anchor="ctr"/>
+          <a:lstStyle/>
+          <a:p>
+            <a:pPr marL="0" indent="0" algn="ctr">
+              <a:buNone/>
+            </a:pPr>
+            <a:r>
+              <a:rPr lang="en-US" sz="1200" b="1" dirty="0">
+                <a:solidFill>
+                  <a:srgbClr val="FFFFFF"/>
+                </a:solidFill>
+                <a:latin typeface="Calibri" pitchFamily="34" charset="0"/>
+                <a:ea typeface="Calibri" pitchFamily="34" charset="-122"/>
+                <a:cs typeface="Calibri" pitchFamily="34" charset="-120"/>
+              </a:rPr>
+              <a:t>AWS Lambda</a:t>
+            </a:r>
+            <a:endParaRPr lang="en-US" sz="1200" dirty="0"/>
+          </a:p>
+        </p:txBody>
+      </p:sp>
+      <p:sp>
+        <p:nvSpPr>
+          <p:cNvPr id="18" name="Shape 13"/>
+          <p:cNvSpPr/>
+          <p:nvPr/>
+        </p:nvSpPr>
+        <p:spPr>
+          <a:xfrm>
+            <a:off x="3429000" y="5257800"/>
+            <a:ext cx="5303520" cy="0"/>
+          </a:xfrm>
+          <a:prstGeom prst="line">
+            <a:avLst/>
+          </a:prstGeom>
+          <a:noFill/>
+          <a:ln w="25400">
+            <a:solidFill>
+              <a:srgbClr val="FF9900"/>
+            </a:solidFill>
+            <a:prstDash val="solid"/>
+            <a:tailEnd type="triangle"/>
+          </a:ln>
+        </p:spPr>
+        <p:txBody>
+          <a:bodyPr/>
+          <a:lstStyle/>
+          <a:p>
+            <a:endParaRPr lang="en-UA"/>
+          </a:p>
+        </p:txBody>
+      </p:sp>
+      <p:sp>
+        <p:nvSpPr>
+          <p:cNvPr id="19" name="Shape 14"/>
+          <p:cNvSpPr/>
+          <p:nvPr/>
+        </p:nvSpPr>
+        <p:spPr>
+          <a:xfrm>
+            <a:off x="5120640" y="4457701"/>
+            <a:ext cx="1920240" cy="384048"/>
+          </a:xfrm>
+          <a:prstGeom prst="roundRect">
+            <a:avLst>
+              <a:gd name="adj" fmla="val 50000"/>
+            </a:avLst>
+          </a:prstGeom>
+          <a:solidFill>
+            <a:srgbClr val="FF9900"/>
+          </a:solidFill>
+          <a:ln/>
+        </p:spPr>
+        <p:txBody>
+          <a:bodyPr/>
+          <a:lstStyle/>
+          <a:p>
+            <a:endParaRPr lang="en-UA"/>
+          </a:p>
+        </p:txBody>
+      </p:sp>
+      <p:sp>
+        <p:nvSpPr>
+          <p:cNvPr id="20" name="Text 15"/>
+          <p:cNvSpPr txBox="1"/>
+          <p:nvPr/>
+        </p:nvSpPr>
+        <p:spPr>
+          <a:xfrm>
+            <a:off x="5120640" y="4457701"/>
+            <a:ext cx="1920240" cy="384048"/>
+          </a:xfrm>
+          <a:prstGeom prst="rect">
+            <a:avLst/>
+          </a:prstGeom>
+          <a:noFill/>
+          <a:ln/>
+        </p:spPr>
+        <p:txBody>
+          <a:bodyPr wrap="square" rtlCol="0" anchor="ctr"/>
+          <a:lstStyle/>
+          <a:p>
+            <a:pPr marL="0" indent="0" algn="ctr">
+              <a:buNone/>
+            </a:pPr>
+            <a:r>
+              <a:rPr lang="en-US" sz="1050" b="1" dirty="0">
+                <a:solidFill>
+                  <a:srgbClr val="232F3E"/>
+                </a:solidFill>
+                <a:latin typeface="Calibri" pitchFamily="34" charset="0"/>
+                <a:ea typeface="Calibri" pitchFamily="34" charset="-122"/>
+                <a:cs typeface="Calibri" pitchFamily="34" charset="-120"/>
+              </a:rPr>
+              <a:t>IAM Role</a:t>
+            </a:r>
+            <a:endParaRPr lang="en-US" sz="1050" dirty="0"/>
+          </a:p>
+        </p:txBody>
+      </p:sp>
+      <p:sp>
+        <p:nvSpPr>
+          <p:cNvPr id="21" name="Text 16"/>
+          <p:cNvSpPr txBox="1"/>
+          <p:nvPr/>
+        </p:nvSpPr>
+        <p:spPr>
+          <a:xfrm>
+            <a:off x="3429000" y="5330952"/>
+            <a:ext cx="5303520" cy="274320"/>
+          </a:xfrm>
+          <a:prstGeom prst="rect">
+            <a:avLst/>
+          </a:prstGeom>
+          <a:noFill/>
+          <a:ln/>
+        </p:spPr>
+        <p:txBody>
+          <a:bodyPr wrap="square" rtlCol="0" anchor="ctr"/>
+          <a:lstStyle/>
+          <a:p>
+            <a:pPr marL="0" indent="0" algn="ctr">
+              <a:buNone/>
+            </a:pPr>
+            <a:r>
+              <a:rPr lang="en-US" sz="1000" i="1" dirty="0">
+                <a:solidFill>
+                  <a:srgbClr val="C7CFDA"/>
+                </a:solidFill>
+                <a:latin typeface="Calibri" pitchFamily="34" charset="0"/>
+                <a:ea typeface="Calibri" pitchFamily="34" charset="-122"/>
+                <a:cs typeface="Calibri" pitchFamily="34" charset="-120"/>
+              </a:rPr>
+              <a:t>записує результат обробки</a:t>
+            </a:r>
+            <a:endParaRPr lang="en-US" sz="1000" dirty="0"/>
+          </a:p>
+        </p:txBody>
+      </p:sp>
+      <p:sp>
+        <p:nvSpPr>
+          <p:cNvPr id="22" name="Shape 17"/>
+          <p:cNvSpPr/>
+          <p:nvPr/>
+        </p:nvSpPr>
+        <p:spPr>
+          <a:xfrm>
+            <a:off x="8961120" y="4663440"/>
+            <a:ext cx="1920240" cy="1188720"/>
+          </a:xfrm>
+          <a:prstGeom prst="roundRect">
+            <a:avLst>
+              <a:gd name="adj" fmla="val 7692"/>
+            </a:avLst>
+          </a:prstGeom>
+          <a:solidFill>
+            <a:srgbClr val="37475A"/>
+          </a:solidFill>
+          <a:ln/>
+        </p:spPr>
+        <p:txBody>
+          <a:bodyPr/>
+          <a:lstStyle/>
+          <a:p>
+            <a:endParaRPr lang="en-UA"/>
+          </a:p>
+        </p:txBody>
+      </p:sp>
+      <p:pic>
+        <p:nvPicPr>
+          <p:cNvPr id="23" name="Image 3" descr="/home/claude/icons/database_orange.png"/>
+          <p:cNvPicPr>
+            <a:picLocks noChangeAspect="1"/>
+          </p:cNvPicPr>
+          <p:nvPr/>
+        </p:nvPicPr>
+        <p:blipFill>
+          <a:blip r:embed="rId6"/>
+          <a:stretch>
+            <a:fillRect/>
+          </a:stretch>
+        </p:blipFill>
+        <p:spPr>
+          <a:xfrm>
+            <a:off x="9665208" y="4846320"/>
+            <a:ext cx="512064" cy="512064"/>
+          </a:xfrm>
+          <a:prstGeom prst="rect">
+            <a:avLst/>
+          </a:prstGeom>
+        </p:spPr>
+      </p:pic>
+      <p:sp>
+        <p:nvSpPr>
+          <p:cNvPr id="24" name="Text 18"/>
+          <p:cNvSpPr txBox="1"/>
+          <p:nvPr/>
+        </p:nvSpPr>
+        <p:spPr>
+          <a:xfrm>
+            <a:off x="8961120" y="5468112"/>
+            <a:ext cx="1920240" cy="320040"/>
+          </a:xfrm>
+          <a:prstGeom prst="rect">
+            <a:avLst/>
+          </a:prstGeom>
+          <a:noFill/>
+          <a:ln/>
+        </p:spPr>
+        <p:txBody>
+          <a:bodyPr wrap="square" rtlCol="0" anchor="ctr"/>
+          <a:lstStyle/>
+          <a:p>
+            <a:pPr marL="0" indent="0" algn="ctr">
+              <a:buNone/>
+            </a:pPr>
+            <a:r>
+              <a:rPr lang="en-US" sz="1200" b="1" dirty="0">
+                <a:solidFill>
+                  <a:srgbClr val="FFFFFF"/>
+                </a:solidFill>
+                <a:latin typeface="Calibri" pitchFamily="34" charset="0"/>
+                <a:ea typeface="Calibri" pitchFamily="34" charset="-122"/>
+                <a:cs typeface="Calibri" pitchFamily="34" charset="-120"/>
+              </a:rPr>
+              <a:t>DynamoDB</a:t>
+            </a:r>
+            <a:endParaRPr lang="en-US" sz="1200" dirty="0"/>
+          </a:p>
+        </p:txBody>
+      </p:sp>
+      <p:sp>
+        <p:nvSpPr>
+          <p:cNvPr id="25" name="Text 19"/>
+          <p:cNvSpPr/>
+          <p:nvPr/>
+        </p:nvSpPr>
+        <p:spPr>
+          <a:xfrm>
+            <a:off x="457200" y="6473952"/>
+            <a:ext cx="7315200" cy="274320"/>
+          </a:xfrm>
+          <a:prstGeom prst="rect">
+            <a:avLst/>
+          </a:prstGeom>
+          <a:noFill/>
+          <a:ln/>
+        </p:spPr>
+        <p:txBody>
+          <a:bodyPr wrap="square" rtlCol="0" anchor="ctr"/>
+          <a:lstStyle/>
+          <a:p>
+            <a:pPr marL="0" indent="0" algn="l">
+              <a:buNone/>
+            </a:pPr>
+            <a:r>
+              <a:rPr lang="en-US" sz="1000" dirty="0">
+                <a:solidFill>
+                  <a:srgbClr val="A9B7C6"/>
+                </a:solidFill>
+                <a:latin typeface="Calibri" pitchFamily="34" charset="0"/>
+                <a:ea typeface="Calibri" pitchFamily="34" charset="-122"/>
+                <a:cs typeface="Calibri" pitchFamily="34" charset="-120"/>
+              </a:rPr>
+              <a:t>AWS IAM: Безпека та керування доступом</a:t>
+            </a:r>
+            <a:endParaRPr lang="en-US" sz="1000" dirty="0"/>
+          </a:p>
+        </p:txBody>
+      </p:sp>
+      <p:sp>
+        <p:nvSpPr>
+          <p:cNvPr id="26" name="Text 20"/>
+          <p:cNvSpPr/>
+          <p:nvPr/>
+        </p:nvSpPr>
+        <p:spPr>
+          <a:xfrm>
+            <a:off x="11274552" y="6473952"/>
+            <a:ext cx="457200" cy="274320"/>
+          </a:xfrm>
+          <a:prstGeom prst="rect">
+            <a:avLst/>
+          </a:prstGeom>
+          <a:noFill/>
+          <a:ln/>
+        </p:spPr>
+        <p:txBody>
+          <a:bodyPr wrap="square" rtlCol="0" anchor="ctr"/>
+          <a:lstStyle/>
+          <a:p>
+            <a:pPr marL="0" indent="0" algn="r">
+              <a:buNone/>
+            </a:pPr>
+            <a:r>
+              <a:rPr lang="en-US" sz="1000" dirty="0">
+                <a:solidFill>
+                  <a:srgbClr val="A9B7C6"/>
+                </a:solidFill>
+                <a:latin typeface="Calibri" pitchFamily="34" charset="0"/>
+                <a:ea typeface="Calibri" pitchFamily="34" charset="-122"/>
+                <a:cs typeface="Calibri" pitchFamily="34" charset="-120"/>
+              </a:rPr>
+              <a:t>7</a:t>
+            </a:r>
+            <a:endParaRPr lang="en-US" sz="1000" dirty="0"/>
+          </a:p>
+        </p:txBody>
+      </p:sp>
+    </p:spTree>
+  </p:cSld>
+  <p:clrMapOvr>
+    <a:masterClrMapping/>
+  </p:clrMapOvr>
+</p:sld>
+</file>
+
+<file path=ppt/slides/slide8.xml><?xml version="1.0" encoding="utf-8"?>
+<p:sld xmlns:a="http://schemas.openxmlformats.org/drawingml/2006/main" xmlns:r="http://schemas.openxmlformats.org/officeDocument/2006/relationships" xmlns:p="http://schemas.openxmlformats.org/presentationml/2006/main">
   <p:cSld name="Slide 6">
     <p:bg>
       <p:bgPr>
@@ -8293,839 +9126,6 @@
                 <a:cs typeface="Calibri" pitchFamily="34" charset="-120"/>
               </a:rPr>
               <a:t>6</a:t>
-            </a:r>
-            <a:endParaRPr lang="en-US" sz="1000" dirty="0"/>
-          </a:p>
-        </p:txBody>
-      </p:sp>
-    </p:spTree>
-  </p:cSld>
-  <p:clrMapOvr>
-    <a:masterClrMapping/>
-  </p:clrMapOvr>
-</p:sld>
-</file>
-
-<file path=ppt/slides/slide8.xml><?xml version="1.0" encoding="utf-8"?>
-<p:sld xmlns:a="http://schemas.openxmlformats.org/drawingml/2006/main" xmlns:r="http://schemas.openxmlformats.org/officeDocument/2006/relationships" xmlns:p="http://schemas.openxmlformats.org/presentationml/2006/main">
-  <p:cSld name="Slide 7">
-    <p:bg>
-      <p:bgPr>
-        <a:solidFill>
-          <a:srgbClr val="232F3E"/>
-        </a:solidFill>
-        <a:effectLst/>
-      </p:bgPr>
-    </p:bg>
-    <p:spTree>
-      <p:nvGrpSpPr>
-        <p:cNvPr id="1" name=""/>
-        <p:cNvGrpSpPr/>
-        <p:nvPr/>
-      </p:nvGrpSpPr>
-      <p:grpSpPr>
-        <a:xfrm>
-          <a:off x="0" y="0"/>
-          <a:ext cx="0" cy="0"/>
-          <a:chOff x="0" y="0"/>
-          <a:chExt cx="0" cy="0"/>
-        </a:xfrm>
-      </p:grpSpPr>
-      <p:sp>
-        <p:nvSpPr>
-          <p:cNvPr id="3" name="Text 1"/>
-          <p:cNvSpPr txBox="1"/>
-          <p:nvPr/>
-        </p:nvSpPr>
-        <p:spPr>
-          <a:xfrm>
-            <a:off x="548640" y="388620"/>
-            <a:ext cx="11064240" cy="822960"/>
-          </a:xfrm>
-          <a:prstGeom prst="rect">
-            <a:avLst/>
-          </a:prstGeom>
-          <a:noFill/>
-          <a:ln/>
-        </p:spPr>
-        <p:txBody>
-          <a:bodyPr wrap="square" rtlCol="0" anchor="ctr"/>
-          <a:lstStyle/>
-          <a:p>
-            <a:pPr marL="0" indent="0">
-              <a:buNone/>
-            </a:pPr>
-            <a:r>
-              <a:rPr lang="en-US" sz="2700" b="1" dirty="0">
-                <a:solidFill>
-                  <a:srgbClr val="FFFFFF"/>
-                </a:solidFill>
-                <a:latin typeface="Cambria" pitchFamily="34" charset="0"/>
-                <a:ea typeface="Cambria" pitchFamily="34" charset="-122"/>
-                <a:cs typeface="Cambria" pitchFamily="34" charset="-120"/>
-              </a:rPr>
-              <a:t>Ролі для сервісів: як AWS-сервіси довіряють одне одному</a:t>
-            </a:r>
-            <a:endParaRPr lang="en-US" sz="2700" dirty="0"/>
-          </a:p>
-        </p:txBody>
-      </p:sp>
-      <p:sp>
-        <p:nvSpPr>
-          <p:cNvPr id="4" name="Text 2"/>
-          <p:cNvSpPr txBox="1"/>
-          <p:nvPr/>
-        </p:nvSpPr>
-        <p:spPr>
-          <a:xfrm>
-            <a:off x="548640" y="1312165"/>
-            <a:ext cx="10789920" cy="457200"/>
-          </a:xfrm>
-          <a:prstGeom prst="rect">
-            <a:avLst/>
-          </a:prstGeom>
-          <a:noFill/>
-          <a:ln/>
-        </p:spPr>
-        <p:txBody>
-          <a:bodyPr wrap="square" rtlCol="0" anchor="ctr"/>
-          <a:lstStyle/>
-          <a:p>
-            <a:pPr marL="0" indent="0">
-              <a:buNone/>
-            </a:pPr>
-            <a:r>
-              <a:rPr lang="en-US" sz="1300" i="1" dirty="0">
-                <a:solidFill>
-                  <a:srgbClr val="CADCFC"/>
-                </a:solidFill>
-                <a:latin typeface="Calibri" pitchFamily="34" charset="0"/>
-                <a:ea typeface="Calibri" pitchFamily="34" charset="-122"/>
-                <a:cs typeface="Calibri" pitchFamily="34" charset="-120"/>
-              </a:rPr>
-              <a:t>Сервісні ролі дозволяють одному сервісу AWS звертатись до іншого без збереження постійних ключів доступу в коді.</a:t>
-            </a:r>
-            <a:endParaRPr lang="en-US" sz="1300" dirty="0"/>
-          </a:p>
-        </p:txBody>
-      </p:sp>
-      <p:sp>
-        <p:nvSpPr>
-          <p:cNvPr id="5" name="Shape 3"/>
-          <p:cNvSpPr/>
-          <p:nvPr/>
-        </p:nvSpPr>
-        <p:spPr>
-          <a:xfrm>
-            <a:off x="1280160" y="2743200"/>
-            <a:ext cx="1920240" cy="1188720"/>
-          </a:xfrm>
-          <a:prstGeom prst="roundRect">
-            <a:avLst>
-              <a:gd name="adj" fmla="val 7692"/>
-            </a:avLst>
-          </a:prstGeom>
-          <a:solidFill>
-            <a:srgbClr val="37475A"/>
-          </a:solidFill>
-          <a:ln/>
-        </p:spPr>
-        <p:txBody>
-          <a:bodyPr/>
-          <a:lstStyle/>
-          <a:p>
-            <a:endParaRPr lang="en-UA"/>
-          </a:p>
-        </p:txBody>
-      </p:sp>
-      <p:pic>
-        <p:nvPicPr>
-          <p:cNvPr id="6" name="Image 0" descr="/home/claude/icons/server_orange.png"/>
-          <p:cNvPicPr>
-            <a:picLocks noChangeAspect="1"/>
-          </p:cNvPicPr>
-          <p:nvPr/>
-        </p:nvPicPr>
-        <p:blipFill>
-          <a:blip r:embed="rId3"/>
-          <a:stretch>
-            <a:fillRect/>
-          </a:stretch>
-        </p:blipFill>
-        <p:spPr>
-          <a:xfrm>
-            <a:off x="1984248" y="2926080"/>
-            <a:ext cx="512064" cy="512064"/>
-          </a:xfrm>
-          <a:prstGeom prst="rect">
-            <a:avLst/>
-          </a:prstGeom>
-        </p:spPr>
-      </p:pic>
-      <p:sp>
-        <p:nvSpPr>
-          <p:cNvPr id="7" name="Text 4"/>
-          <p:cNvSpPr txBox="1"/>
-          <p:nvPr/>
-        </p:nvSpPr>
-        <p:spPr>
-          <a:xfrm>
-            <a:off x="1280160" y="3547872"/>
-            <a:ext cx="1920240" cy="320040"/>
-          </a:xfrm>
-          <a:prstGeom prst="rect">
-            <a:avLst/>
-          </a:prstGeom>
-          <a:noFill/>
-          <a:ln/>
-        </p:spPr>
-        <p:txBody>
-          <a:bodyPr wrap="square" rtlCol="0" anchor="ctr"/>
-          <a:lstStyle/>
-          <a:p>
-            <a:pPr marL="0" indent="0" algn="ctr">
-              <a:buNone/>
-            </a:pPr>
-            <a:r>
-              <a:rPr lang="en-US" sz="1200" b="1" dirty="0">
-                <a:solidFill>
-                  <a:srgbClr val="FFFFFF"/>
-                </a:solidFill>
-                <a:latin typeface="Calibri" pitchFamily="34" charset="0"/>
-                <a:ea typeface="Calibri" pitchFamily="34" charset="-122"/>
-                <a:cs typeface="Calibri" pitchFamily="34" charset="-120"/>
-              </a:rPr>
-              <a:t>EC2 Instance</a:t>
-            </a:r>
-            <a:endParaRPr lang="en-US" sz="1200" dirty="0"/>
-          </a:p>
-        </p:txBody>
-      </p:sp>
-      <p:sp>
-        <p:nvSpPr>
-          <p:cNvPr id="8" name="Shape 5"/>
-          <p:cNvSpPr/>
-          <p:nvPr/>
-        </p:nvSpPr>
-        <p:spPr>
-          <a:xfrm>
-            <a:off x="3429000" y="3337560"/>
-            <a:ext cx="5303520" cy="0"/>
-          </a:xfrm>
-          <a:prstGeom prst="line">
-            <a:avLst/>
-          </a:prstGeom>
-          <a:noFill/>
-          <a:ln w="25400">
-            <a:solidFill>
-              <a:srgbClr val="FF9900"/>
-            </a:solidFill>
-            <a:prstDash val="solid"/>
-            <a:tailEnd type="triangle"/>
-          </a:ln>
-        </p:spPr>
-        <p:txBody>
-          <a:bodyPr/>
-          <a:lstStyle/>
-          <a:p>
-            <a:endParaRPr lang="en-UA"/>
-          </a:p>
-        </p:txBody>
-      </p:sp>
-      <p:sp>
-        <p:nvSpPr>
-          <p:cNvPr id="9" name="Shape 6"/>
-          <p:cNvSpPr/>
-          <p:nvPr/>
-        </p:nvSpPr>
-        <p:spPr>
-          <a:xfrm>
-            <a:off x="5120640" y="2574036"/>
-            <a:ext cx="1920240" cy="384048"/>
-          </a:xfrm>
-          <a:prstGeom prst="roundRect">
-            <a:avLst>
-              <a:gd name="adj" fmla="val 50000"/>
-            </a:avLst>
-          </a:prstGeom>
-          <a:solidFill>
-            <a:srgbClr val="FF9900"/>
-          </a:solidFill>
-          <a:ln/>
-        </p:spPr>
-        <p:txBody>
-          <a:bodyPr/>
-          <a:lstStyle/>
-          <a:p>
-            <a:endParaRPr lang="en-UA"/>
-          </a:p>
-        </p:txBody>
-      </p:sp>
-      <p:sp>
-        <p:nvSpPr>
-          <p:cNvPr id="10" name="Text 7"/>
-          <p:cNvSpPr txBox="1"/>
-          <p:nvPr/>
-        </p:nvSpPr>
-        <p:spPr>
-          <a:xfrm>
-            <a:off x="5120640" y="2574036"/>
-            <a:ext cx="1920240" cy="384048"/>
-          </a:xfrm>
-          <a:prstGeom prst="rect">
-            <a:avLst/>
-          </a:prstGeom>
-          <a:noFill/>
-          <a:ln/>
-        </p:spPr>
-        <p:txBody>
-          <a:bodyPr wrap="square" rtlCol="0" anchor="ctr"/>
-          <a:lstStyle/>
-          <a:p>
-            <a:pPr marL="0" indent="0" algn="ctr">
-              <a:buNone/>
-            </a:pPr>
-            <a:r>
-              <a:rPr lang="en-US" sz="1050" b="1" dirty="0">
-                <a:solidFill>
-                  <a:srgbClr val="232F3E"/>
-                </a:solidFill>
-                <a:latin typeface="Calibri" pitchFamily="34" charset="0"/>
-                <a:ea typeface="Calibri" pitchFamily="34" charset="-122"/>
-                <a:cs typeface="Calibri" pitchFamily="34" charset="-120"/>
-              </a:rPr>
-              <a:t>IAM Role</a:t>
-            </a:r>
-            <a:endParaRPr lang="en-US" sz="1050" dirty="0"/>
-          </a:p>
-        </p:txBody>
-      </p:sp>
-      <p:sp>
-        <p:nvSpPr>
-          <p:cNvPr id="11" name="Text 8"/>
-          <p:cNvSpPr txBox="1"/>
-          <p:nvPr/>
-        </p:nvSpPr>
-        <p:spPr>
-          <a:xfrm>
-            <a:off x="3429000" y="3410712"/>
-            <a:ext cx="5303520" cy="274320"/>
-          </a:xfrm>
-          <a:prstGeom prst="rect">
-            <a:avLst/>
-          </a:prstGeom>
-          <a:noFill/>
-          <a:ln/>
-        </p:spPr>
-        <p:txBody>
-          <a:bodyPr wrap="square" rtlCol="0" anchor="ctr"/>
-          <a:lstStyle/>
-          <a:p>
-            <a:pPr marL="0" indent="0" algn="ctr">
-              <a:buNone/>
-            </a:pPr>
-            <a:r>
-              <a:rPr lang="en-US" sz="1000" i="1" dirty="0">
-                <a:solidFill>
-                  <a:srgbClr val="C7CFDA"/>
-                </a:solidFill>
-                <a:latin typeface="Calibri" pitchFamily="34" charset="0"/>
-                <a:ea typeface="Calibri" pitchFamily="34" charset="-122"/>
-                <a:cs typeface="Calibri" pitchFamily="34" charset="-120"/>
-              </a:rPr>
-              <a:t>читає файли конфігурації</a:t>
-            </a:r>
-            <a:endParaRPr lang="en-US" sz="1000" dirty="0"/>
-          </a:p>
-        </p:txBody>
-      </p:sp>
-      <p:sp>
-        <p:nvSpPr>
-          <p:cNvPr id="12" name="Shape 9"/>
-          <p:cNvSpPr/>
-          <p:nvPr/>
-        </p:nvSpPr>
-        <p:spPr>
-          <a:xfrm>
-            <a:off x="8961120" y="2743200"/>
-            <a:ext cx="1920240" cy="1188720"/>
-          </a:xfrm>
-          <a:prstGeom prst="roundRect">
-            <a:avLst>
-              <a:gd name="adj" fmla="val 7692"/>
-            </a:avLst>
-          </a:prstGeom>
-          <a:solidFill>
-            <a:srgbClr val="37475A"/>
-          </a:solidFill>
-          <a:ln/>
-        </p:spPr>
-        <p:txBody>
-          <a:bodyPr/>
-          <a:lstStyle/>
-          <a:p>
-            <a:endParaRPr lang="en-UA"/>
-          </a:p>
-        </p:txBody>
-      </p:sp>
-      <p:pic>
-        <p:nvPicPr>
-          <p:cNvPr id="13" name="Image 1" descr="/home/claude/icons/cube_orange.png"/>
-          <p:cNvPicPr>
-            <a:picLocks noChangeAspect="1"/>
-          </p:cNvPicPr>
-          <p:nvPr/>
-        </p:nvPicPr>
-        <p:blipFill>
-          <a:blip r:embed="rId4"/>
-          <a:stretch>
-            <a:fillRect/>
-          </a:stretch>
-        </p:blipFill>
-        <p:spPr>
-          <a:xfrm>
-            <a:off x="9665208" y="2926080"/>
-            <a:ext cx="512064" cy="512064"/>
-          </a:xfrm>
-          <a:prstGeom prst="rect">
-            <a:avLst/>
-          </a:prstGeom>
-        </p:spPr>
-      </p:pic>
-      <p:sp>
-        <p:nvSpPr>
-          <p:cNvPr id="14" name="Text 10"/>
-          <p:cNvSpPr txBox="1"/>
-          <p:nvPr/>
-        </p:nvSpPr>
-        <p:spPr>
-          <a:xfrm>
-            <a:off x="8961120" y="3547872"/>
-            <a:ext cx="1920240" cy="320040"/>
-          </a:xfrm>
-          <a:prstGeom prst="rect">
-            <a:avLst/>
-          </a:prstGeom>
-          <a:noFill/>
-          <a:ln/>
-        </p:spPr>
-        <p:txBody>
-          <a:bodyPr wrap="square" rtlCol="0" anchor="ctr"/>
-          <a:lstStyle/>
-          <a:p>
-            <a:pPr marL="0" indent="0" algn="ctr">
-              <a:buNone/>
-            </a:pPr>
-            <a:r>
-              <a:rPr lang="en-US" sz="1200" b="1" dirty="0">
-                <a:solidFill>
-                  <a:srgbClr val="FFFFFF"/>
-                </a:solidFill>
-                <a:latin typeface="Calibri" pitchFamily="34" charset="0"/>
-                <a:ea typeface="Calibri" pitchFamily="34" charset="-122"/>
-                <a:cs typeface="Calibri" pitchFamily="34" charset="-120"/>
-              </a:rPr>
-              <a:t>Amazon S3</a:t>
-            </a:r>
-            <a:endParaRPr lang="en-US" sz="1200" dirty="0"/>
-          </a:p>
-        </p:txBody>
-      </p:sp>
-      <p:sp>
-        <p:nvSpPr>
-          <p:cNvPr id="15" name="Shape 11"/>
-          <p:cNvSpPr/>
-          <p:nvPr/>
-        </p:nvSpPr>
-        <p:spPr>
-          <a:xfrm>
-            <a:off x="1280160" y="4663440"/>
-            <a:ext cx="1920240" cy="1188720"/>
-          </a:xfrm>
-          <a:prstGeom prst="roundRect">
-            <a:avLst>
-              <a:gd name="adj" fmla="val 7692"/>
-            </a:avLst>
-          </a:prstGeom>
-          <a:solidFill>
-            <a:srgbClr val="37475A"/>
-          </a:solidFill>
-          <a:ln/>
-        </p:spPr>
-        <p:txBody>
-          <a:bodyPr/>
-          <a:lstStyle/>
-          <a:p>
-            <a:endParaRPr lang="en-UA"/>
-          </a:p>
-        </p:txBody>
-      </p:sp>
-      <p:pic>
-        <p:nvPicPr>
-          <p:cNvPr id="16" name="Image 2" descr="/home/claude/icons/cogs_orange.png"/>
-          <p:cNvPicPr>
-            <a:picLocks noChangeAspect="1"/>
-          </p:cNvPicPr>
-          <p:nvPr/>
-        </p:nvPicPr>
-        <p:blipFill>
-          <a:blip r:embed="rId5"/>
-          <a:stretch>
-            <a:fillRect/>
-          </a:stretch>
-        </p:blipFill>
-        <p:spPr>
-          <a:xfrm>
-            <a:off x="1984248" y="4846320"/>
-            <a:ext cx="512064" cy="512064"/>
-          </a:xfrm>
-          <a:prstGeom prst="rect">
-            <a:avLst/>
-          </a:prstGeom>
-        </p:spPr>
-      </p:pic>
-      <p:sp>
-        <p:nvSpPr>
-          <p:cNvPr id="17" name="Text 12"/>
-          <p:cNvSpPr txBox="1"/>
-          <p:nvPr/>
-        </p:nvSpPr>
-        <p:spPr>
-          <a:xfrm>
-            <a:off x="1280160" y="5468112"/>
-            <a:ext cx="1920240" cy="320040"/>
-          </a:xfrm>
-          <a:prstGeom prst="rect">
-            <a:avLst/>
-          </a:prstGeom>
-          <a:noFill/>
-          <a:ln/>
-        </p:spPr>
-        <p:txBody>
-          <a:bodyPr wrap="square" rtlCol="0" anchor="ctr"/>
-          <a:lstStyle/>
-          <a:p>
-            <a:pPr marL="0" indent="0" algn="ctr">
-              <a:buNone/>
-            </a:pPr>
-            <a:r>
-              <a:rPr lang="en-US" sz="1200" b="1" dirty="0">
-                <a:solidFill>
-                  <a:srgbClr val="FFFFFF"/>
-                </a:solidFill>
-                <a:latin typeface="Calibri" pitchFamily="34" charset="0"/>
-                <a:ea typeface="Calibri" pitchFamily="34" charset="-122"/>
-                <a:cs typeface="Calibri" pitchFamily="34" charset="-120"/>
-              </a:rPr>
-              <a:t>AWS Lambda</a:t>
-            </a:r>
-            <a:endParaRPr lang="en-US" sz="1200" dirty="0"/>
-          </a:p>
-        </p:txBody>
-      </p:sp>
-      <p:sp>
-        <p:nvSpPr>
-          <p:cNvPr id="18" name="Shape 13"/>
-          <p:cNvSpPr/>
-          <p:nvPr/>
-        </p:nvSpPr>
-        <p:spPr>
-          <a:xfrm>
-            <a:off x="3429000" y="5257800"/>
-            <a:ext cx="5303520" cy="0"/>
-          </a:xfrm>
-          <a:prstGeom prst="line">
-            <a:avLst/>
-          </a:prstGeom>
-          <a:noFill/>
-          <a:ln w="25400">
-            <a:solidFill>
-              <a:srgbClr val="FF9900"/>
-            </a:solidFill>
-            <a:prstDash val="solid"/>
-            <a:tailEnd type="triangle"/>
-          </a:ln>
-        </p:spPr>
-        <p:txBody>
-          <a:bodyPr/>
-          <a:lstStyle/>
-          <a:p>
-            <a:endParaRPr lang="en-UA"/>
-          </a:p>
-        </p:txBody>
-      </p:sp>
-      <p:sp>
-        <p:nvSpPr>
-          <p:cNvPr id="19" name="Shape 14"/>
-          <p:cNvSpPr/>
-          <p:nvPr/>
-        </p:nvSpPr>
-        <p:spPr>
-          <a:xfrm>
-            <a:off x="5120640" y="4457701"/>
-            <a:ext cx="1920240" cy="384048"/>
-          </a:xfrm>
-          <a:prstGeom prst="roundRect">
-            <a:avLst>
-              <a:gd name="adj" fmla="val 50000"/>
-            </a:avLst>
-          </a:prstGeom>
-          <a:solidFill>
-            <a:srgbClr val="FF9900"/>
-          </a:solidFill>
-          <a:ln/>
-        </p:spPr>
-        <p:txBody>
-          <a:bodyPr/>
-          <a:lstStyle/>
-          <a:p>
-            <a:endParaRPr lang="en-UA"/>
-          </a:p>
-        </p:txBody>
-      </p:sp>
-      <p:sp>
-        <p:nvSpPr>
-          <p:cNvPr id="20" name="Text 15"/>
-          <p:cNvSpPr txBox="1"/>
-          <p:nvPr/>
-        </p:nvSpPr>
-        <p:spPr>
-          <a:xfrm>
-            <a:off x="5120640" y="4457701"/>
-            <a:ext cx="1920240" cy="384048"/>
-          </a:xfrm>
-          <a:prstGeom prst="rect">
-            <a:avLst/>
-          </a:prstGeom>
-          <a:noFill/>
-          <a:ln/>
-        </p:spPr>
-        <p:txBody>
-          <a:bodyPr wrap="square" rtlCol="0" anchor="ctr"/>
-          <a:lstStyle/>
-          <a:p>
-            <a:pPr marL="0" indent="0" algn="ctr">
-              <a:buNone/>
-            </a:pPr>
-            <a:r>
-              <a:rPr lang="en-US" sz="1050" b="1" dirty="0">
-                <a:solidFill>
-                  <a:srgbClr val="232F3E"/>
-                </a:solidFill>
-                <a:latin typeface="Calibri" pitchFamily="34" charset="0"/>
-                <a:ea typeface="Calibri" pitchFamily="34" charset="-122"/>
-                <a:cs typeface="Calibri" pitchFamily="34" charset="-120"/>
-              </a:rPr>
-              <a:t>IAM Role</a:t>
-            </a:r>
-            <a:endParaRPr lang="en-US" sz="1050" dirty="0"/>
-          </a:p>
-        </p:txBody>
-      </p:sp>
-      <p:sp>
-        <p:nvSpPr>
-          <p:cNvPr id="21" name="Text 16"/>
-          <p:cNvSpPr txBox="1"/>
-          <p:nvPr/>
-        </p:nvSpPr>
-        <p:spPr>
-          <a:xfrm>
-            <a:off x="3429000" y="5330952"/>
-            <a:ext cx="5303520" cy="274320"/>
-          </a:xfrm>
-          <a:prstGeom prst="rect">
-            <a:avLst/>
-          </a:prstGeom>
-          <a:noFill/>
-          <a:ln/>
-        </p:spPr>
-        <p:txBody>
-          <a:bodyPr wrap="square" rtlCol="0" anchor="ctr"/>
-          <a:lstStyle/>
-          <a:p>
-            <a:pPr marL="0" indent="0" algn="ctr">
-              <a:buNone/>
-            </a:pPr>
-            <a:r>
-              <a:rPr lang="en-US" sz="1000" i="1" dirty="0">
-                <a:solidFill>
-                  <a:srgbClr val="C7CFDA"/>
-                </a:solidFill>
-                <a:latin typeface="Calibri" pitchFamily="34" charset="0"/>
-                <a:ea typeface="Calibri" pitchFamily="34" charset="-122"/>
-                <a:cs typeface="Calibri" pitchFamily="34" charset="-120"/>
-              </a:rPr>
-              <a:t>записує результат обробки</a:t>
-            </a:r>
-            <a:endParaRPr lang="en-US" sz="1000" dirty="0"/>
-          </a:p>
-        </p:txBody>
-      </p:sp>
-      <p:sp>
-        <p:nvSpPr>
-          <p:cNvPr id="22" name="Shape 17"/>
-          <p:cNvSpPr/>
-          <p:nvPr/>
-        </p:nvSpPr>
-        <p:spPr>
-          <a:xfrm>
-            <a:off x="8961120" y="4663440"/>
-            <a:ext cx="1920240" cy="1188720"/>
-          </a:xfrm>
-          <a:prstGeom prst="roundRect">
-            <a:avLst>
-              <a:gd name="adj" fmla="val 7692"/>
-            </a:avLst>
-          </a:prstGeom>
-          <a:solidFill>
-            <a:srgbClr val="37475A"/>
-          </a:solidFill>
-          <a:ln/>
-        </p:spPr>
-        <p:txBody>
-          <a:bodyPr/>
-          <a:lstStyle/>
-          <a:p>
-            <a:endParaRPr lang="en-UA"/>
-          </a:p>
-        </p:txBody>
-      </p:sp>
-      <p:pic>
-        <p:nvPicPr>
-          <p:cNvPr id="23" name="Image 3" descr="/home/claude/icons/database_orange.png"/>
-          <p:cNvPicPr>
-            <a:picLocks noChangeAspect="1"/>
-          </p:cNvPicPr>
-          <p:nvPr/>
-        </p:nvPicPr>
-        <p:blipFill>
-          <a:blip r:embed="rId6"/>
-          <a:stretch>
-            <a:fillRect/>
-          </a:stretch>
-        </p:blipFill>
-        <p:spPr>
-          <a:xfrm>
-            <a:off x="9665208" y="4846320"/>
-            <a:ext cx="512064" cy="512064"/>
-          </a:xfrm>
-          <a:prstGeom prst="rect">
-            <a:avLst/>
-          </a:prstGeom>
-        </p:spPr>
-      </p:pic>
-      <p:sp>
-        <p:nvSpPr>
-          <p:cNvPr id="24" name="Text 18"/>
-          <p:cNvSpPr txBox="1"/>
-          <p:nvPr/>
-        </p:nvSpPr>
-        <p:spPr>
-          <a:xfrm>
-            <a:off x="8961120" y="5468112"/>
-            <a:ext cx="1920240" cy="320040"/>
-          </a:xfrm>
-          <a:prstGeom prst="rect">
-            <a:avLst/>
-          </a:prstGeom>
-          <a:noFill/>
-          <a:ln/>
-        </p:spPr>
-        <p:txBody>
-          <a:bodyPr wrap="square" rtlCol="0" anchor="ctr"/>
-          <a:lstStyle/>
-          <a:p>
-            <a:pPr marL="0" indent="0" algn="ctr">
-              <a:buNone/>
-            </a:pPr>
-            <a:r>
-              <a:rPr lang="en-US" sz="1200" b="1" dirty="0">
-                <a:solidFill>
-                  <a:srgbClr val="FFFFFF"/>
-                </a:solidFill>
-                <a:latin typeface="Calibri" pitchFamily="34" charset="0"/>
-                <a:ea typeface="Calibri" pitchFamily="34" charset="-122"/>
-                <a:cs typeface="Calibri" pitchFamily="34" charset="-120"/>
-              </a:rPr>
-              <a:t>DynamoDB</a:t>
-            </a:r>
-            <a:endParaRPr lang="en-US" sz="1200" dirty="0"/>
-          </a:p>
-        </p:txBody>
-      </p:sp>
-      <p:sp>
-        <p:nvSpPr>
-          <p:cNvPr id="25" name="Text 19"/>
-          <p:cNvSpPr/>
-          <p:nvPr/>
-        </p:nvSpPr>
-        <p:spPr>
-          <a:xfrm>
-            <a:off x="457200" y="6473952"/>
-            <a:ext cx="7315200" cy="274320"/>
-          </a:xfrm>
-          <a:prstGeom prst="rect">
-            <a:avLst/>
-          </a:prstGeom>
-          <a:noFill/>
-          <a:ln/>
-        </p:spPr>
-        <p:txBody>
-          <a:bodyPr wrap="square" rtlCol="0" anchor="ctr"/>
-          <a:lstStyle/>
-          <a:p>
-            <a:pPr marL="0" indent="0" algn="l">
-              <a:buNone/>
-            </a:pPr>
-            <a:r>
-              <a:rPr lang="en-US" sz="1000" dirty="0">
-                <a:solidFill>
-                  <a:srgbClr val="A9B7C6"/>
-                </a:solidFill>
-                <a:latin typeface="Calibri" pitchFamily="34" charset="0"/>
-                <a:ea typeface="Calibri" pitchFamily="34" charset="-122"/>
-                <a:cs typeface="Calibri" pitchFamily="34" charset="-120"/>
-              </a:rPr>
-              <a:t>AWS IAM: Безпека та керування доступом</a:t>
-            </a:r>
-            <a:endParaRPr lang="en-US" sz="1000" dirty="0"/>
-          </a:p>
-        </p:txBody>
-      </p:sp>
-      <p:sp>
-        <p:nvSpPr>
-          <p:cNvPr id="26" name="Text 20"/>
-          <p:cNvSpPr/>
-          <p:nvPr/>
-        </p:nvSpPr>
-        <p:spPr>
-          <a:xfrm>
-            <a:off x="11274552" y="6473952"/>
-            <a:ext cx="457200" cy="274320"/>
-          </a:xfrm>
-          <a:prstGeom prst="rect">
-            <a:avLst/>
-          </a:prstGeom>
-          <a:noFill/>
-          <a:ln/>
-        </p:spPr>
-        <p:txBody>
-          <a:bodyPr wrap="square" rtlCol="0" anchor="ctr"/>
-          <a:lstStyle/>
-          <a:p>
-            <a:pPr marL="0" indent="0" algn="r">
-              <a:buNone/>
-            </a:pPr>
-            <a:r>
-              <a:rPr lang="en-US" sz="1000" dirty="0">
-                <a:solidFill>
-                  <a:srgbClr val="A9B7C6"/>
-                </a:solidFill>
-                <a:latin typeface="Calibri" pitchFamily="34" charset="0"/>
-                <a:ea typeface="Calibri" pitchFamily="34" charset="-122"/>
-                <a:cs typeface="Calibri" pitchFamily="34" charset="-120"/>
-              </a:rPr>
-              <a:t>7</a:t>
             </a:r>
             <a:endParaRPr lang="en-US" sz="1000" dirty="0"/>
           </a:p>
